--- a/src/epy_slides/_config/_assets/reference_pptx/academic.pptx
+++ b/src/epy_slides/_config/_assets/reference_pptx/academic.pptx
@@ -4,7 +4,7 @@
   <p:sldMasterIdLst>
     <p:sldMasterId id="2147483648" r:id="rId1"/>
   </p:sldMasterIdLst>
-  <p:sldSz cx="12192000" cy="6858000" type="screen4x3"/>
+  <p:sldSz cx="12192000" cy="6858000"/>
   <p:notesSz cx="6858000" cy="9144000"/>
   <p:defaultTextStyle>
     <a:defPPr>
@@ -138,7 +138,9 @@
           </a:xfrm>
         </p:spPr>
         <p:txBody>
-          <a:bodyPr/>
+          <a:bodyPr>
+            <a:normAutofit/>
+          </a:bodyPr>
           <a:lstStyle/>
           <a:p>
             <a:r>
@@ -166,7 +168,9 @@
           </a:xfrm>
         </p:spPr>
         <p:txBody>
-          <a:bodyPr/>
+          <a:bodyPr>
+            <a:normAutofit/>
+          </a:bodyPr>
           <a:lstStyle>
             <a:lvl1pPr marL="0" indent="0" algn="ctr">
               <a:buNone/>
@@ -375,7 +379,9 @@
         </p:nvSpPr>
         <p:spPr/>
         <p:txBody>
-          <a:bodyPr/>
+          <a:bodyPr>
+            <a:normAutofit/>
+          </a:bodyPr>
           <a:lstStyle/>
           <a:p>
             <a:r>
@@ -398,7 +404,9 @@
         </p:nvSpPr>
         <p:spPr/>
         <p:txBody>
-          <a:bodyPr vert="eaVert"/>
+          <a:bodyPr vert="eaVert">
+            <a:normAutofit/>
+          </a:bodyPr>
           <a:lstStyle/>
           <a:p>
             <a:pPr lvl="0"/>
@@ -550,7 +558,9 @@
           </a:xfrm>
         </p:spPr>
         <p:txBody>
-          <a:bodyPr vert="eaVert"/>
+          <a:bodyPr vert="eaVert">
+            <a:normAutofit/>
+          </a:bodyPr>
           <a:lstStyle/>
           <a:p>
             <a:r>
@@ -578,7 +588,9 @@
           </a:xfrm>
         </p:spPr>
         <p:txBody>
-          <a:bodyPr vert="eaVert"/>
+          <a:bodyPr vert="eaVert">
+            <a:normAutofit/>
+          </a:bodyPr>
           <a:lstStyle/>
           <a:p>
             <a:pPr lvl="0"/>
@@ -725,7 +737,9 @@
         </p:nvSpPr>
         <p:spPr/>
         <p:txBody>
-          <a:bodyPr/>
+          <a:bodyPr>
+            <a:normAutofit/>
+          </a:bodyPr>
           <a:lstStyle/>
           <a:p>
             <a:r>
@@ -748,7 +762,9 @@
         </p:nvSpPr>
         <p:spPr/>
         <p:txBody>
-          <a:bodyPr/>
+          <a:bodyPr>
+            <a:normAutofit/>
+          </a:bodyPr>
           <a:lstStyle/>
           <a:p>
             <a:pPr lvl="0"/>
@@ -900,7 +916,9 @@
           </a:xfrm>
         </p:spPr>
         <p:txBody>
-          <a:bodyPr anchor="t"/>
+          <a:bodyPr anchor="t">
+            <a:normAutofit/>
+          </a:bodyPr>
           <a:lstStyle>
             <a:lvl1pPr algn="l">
               <a:defRPr sz="4000" b="1" cap="all"/>
@@ -932,7 +950,9 @@
           </a:xfrm>
         </p:spPr>
         <p:txBody>
-          <a:bodyPr anchor="b"/>
+          <a:bodyPr anchor="b">
+            <a:normAutofit/>
+          </a:bodyPr>
           <a:lstStyle>
             <a:lvl1pPr marL="0" indent="0">
               <a:buNone/>
@@ -1141,7 +1161,9 @@
         </p:nvSpPr>
         <p:spPr/>
         <p:txBody>
-          <a:bodyPr/>
+          <a:bodyPr>
+            <a:normAutofit/>
+          </a:bodyPr>
           <a:lstStyle/>
           <a:p>
             <a:r>
@@ -1169,7 +1191,9 @@
           </a:xfrm>
         </p:spPr>
         <p:txBody>
-          <a:bodyPr/>
+          <a:bodyPr>
+            <a:normAutofit/>
+          </a:bodyPr>
           <a:lstStyle>
             <a:lvl1pPr>
               <a:defRPr sz="2800"/>
@@ -1254,7 +1278,9 @@
           </a:xfrm>
         </p:spPr>
         <p:txBody>
-          <a:bodyPr/>
+          <a:bodyPr>
+            <a:normAutofit/>
+          </a:bodyPr>
           <a:lstStyle>
             <a:lvl1pPr>
               <a:defRPr sz="2800"/>
@@ -1429,7 +1455,9 @@
         </p:nvSpPr>
         <p:spPr/>
         <p:txBody>
-          <a:bodyPr/>
+          <a:bodyPr>
+            <a:normAutofit/>
+          </a:bodyPr>
           <a:lstStyle>
             <a:lvl1pPr>
               <a:defRPr/>
@@ -1461,7 +1489,9 @@
           </a:xfrm>
         </p:spPr>
         <p:txBody>
-          <a:bodyPr anchor="b"/>
+          <a:bodyPr anchor="b">
+            <a:normAutofit/>
+          </a:bodyPr>
           <a:lstStyle>
             <a:lvl1pPr marL="0" indent="0">
               <a:buNone/>
@@ -1526,7 +1556,9 @@
           </a:xfrm>
         </p:spPr>
         <p:txBody>
-          <a:bodyPr/>
+          <a:bodyPr>
+            <a:normAutofit/>
+          </a:bodyPr>
           <a:lstStyle>
             <a:lvl1pPr>
               <a:defRPr sz="2400"/>
@@ -1611,7 +1643,9 @@
           </a:xfrm>
         </p:spPr>
         <p:txBody>
-          <a:bodyPr anchor="b"/>
+          <a:bodyPr anchor="b">
+            <a:normAutofit/>
+          </a:bodyPr>
           <a:lstStyle>
             <a:lvl1pPr marL="0" indent="0">
               <a:buNone/>
@@ -1676,7 +1710,9 @@
           </a:xfrm>
         </p:spPr>
         <p:txBody>
-          <a:bodyPr/>
+          <a:bodyPr>
+            <a:normAutofit/>
+          </a:bodyPr>
           <a:lstStyle>
             <a:lvl1pPr>
               <a:defRPr sz="2400"/>
@@ -1851,7 +1887,9 @@
         </p:nvSpPr>
         <p:spPr/>
         <p:txBody>
-          <a:bodyPr/>
+          <a:bodyPr>
+            <a:normAutofit/>
+          </a:bodyPr>
           <a:lstStyle/>
           <a:p>
             <a:r>
@@ -2069,7 +2107,9 @@
           </a:xfrm>
         </p:spPr>
         <p:txBody>
-          <a:bodyPr anchor="b"/>
+          <a:bodyPr anchor="b">
+            <a:normAutofit/>
+          </a:bodyPr>
           <a:lstStyle>
             <a:lvl1pPr algn="l">
               <a:defRPr sz="2000" b="1"/>
@@ -2101,7 +2141,9 @@
           </a:xfrm>
         </p:spPr>
         <p:txBody>
-          <a:bodyPr/>
+          <a:bodyPr>
+            <a:normAutofit/>
+          </a:bodyPr>
           <a:lstStyle>
             <a:lvl1pPr>
               <a:defRPr sz="3200"/>
@@ -2186,7 +2228,9 @@
           </a:xfrm>
         </p:spPr>
         <p:txBody>
-          <a:bodyPr/>
+          <a:bodyPr>
+            <a:normAutofit/>
+          </a:bodyPr>
           <a:lstStyle>
             <a:lvl1pPr marL="0" indent="0">
               <a:buNone/>
@@ -2346,7 +2390,9 @@
           </a:xfrm>
         </p:spPr>
         <p:txBody>
-          <a:bodyPr anchor="b"/>
+          <a:bodyPr anchor="b">
+            <a:normAutofit/>
+          </a:bodyPr>
           <a:lstStyle>
             <a:lvl1pPr algn="l">
               <a:defRPr sz="2000" b="1"/>
@@ -2378,7 +2424,9 @@
           </a:xfrm>
         </p:spPr>
         <p:txBody>
-          <a:bodyPr/>
+          <a:bodyPr>
+            <a:normAutofit/>
+          </a:bodyPr>
           <a:lstStyle>
             <a:lvl1pPr marL="0" indent="0">
               <a:buNone/>
@@ -2439,7 +2487,9 @@
           </a:xfrm>
         </p:spPr>
         <p:txBody>
-          <a:bodyPr/>
+          <a:bodyPr>
+            <a:normAutofit/>
+          </a:bodyPr>
           <a:lstStyle>
             <a:lvl1pPr marL="0" indent="0">
               <a:buNone/>
@@ -2829,7 +2879,7 @@
           <a:spcPct val="0"/>
         </a:spcBef>
         <a:buNone/>
-        <a:defRPr sz="4400" kern="1200">
+        <a:defRPr sz="3600" kern="1200">
           <a:solidFill>
             <a:schemeClr val="tx1"/>
           </a:solidFill>
@@ -2846,7 +2896,7 @@
         </a:spcBef>
         <a:buFont typeface="Arial"/>
         <a:buChar char="•"/>
-        <a:defRPr sz="3200" kern="1200">
+        <a:defRPr sz="2200" kern="1200">
           <a:solidFill>
             <a:schemeClr val="tx1"/>
           </a:solidFill>
@@ -2861,7 +2911,7 @@
         </a:spcBef>
         <a:buFont typeface="Arial"/>
         <a:buChar char="–"/>
-        <a:defRPr sz="2800" kern="1200">
+        <a:defRPr sz="2000" kern="1200">
           <a:solidFill>
             <a:schemeClr val="tx1"/>
           </a:solidFill>
@@ -2876,7 +2926,7 @@
         </a:spcBef>
         <a:buFont typeface="Arial"/>
         <a:buChar char="•"/>
-        <a:defRPr sz="2400" kern="1200">
+        <a:defRPr sz="1800" kern="1200">
           <a:solidFill>
             <a:schemeClr val="tx1"/>
           </a:solidFill>
@@ -2891,7 +2941,7 @@
         </a:spcBef>
         <a:buFont typeface="Arial"/>
         <a:buChar char="–"/>
-        <a:defRPr sz="2000" kern="1200">
+        <a:defRPr sz="1600" kern="1200">
           <a:solidFill>
             <a:schemeClr val="tx1"/>
           </a:solidFill>
@@ -2906,7 +2956,7 @@
         </a:spcBef>
         <a:buFont typeface="Arial"/>
         <a:buChar char="»"/>
-        <a:defRPr sz="2000" kern="1200">
+        <a:defRPr sz="1600" kern="1200">
           <a:solidFill>
             <a:schemeClr val="tx1"/>
           </a:solidFill>
@@ -2921,7 +2971,7 @@
         </a:spcBef>
         <a:buFont typeface="Arial"/>
         <a:buChar char="•"/>
-        <a:defRPr sz="2000" kern="1200">
+        <a:defRPr sz="1600" kern="1200">
           <a:solidFill>
             <a:schemeClr val="tx1"/>
           </a:solidFill>
@@ -2936,7 +2986,7 @@
         </a:spcBef>
         <a:buFont typeface="Arial"/>
         <a:buChar char="•"/>
-        <a:defRPr sz="2000" kern="1200">
+        <a:defRPr sz="1600" kern="1200">
           <a:solidFill>
             <a:schemeClr val="tx1"/>
           </a:solidFill>
@@ -2951,7 +3001,7 @@
         </a:spcBef>
         <a:buFont typeface="Arial"/>
         <a:buChar char="•"/>
-        <a:defRPr sz="2000" kern="1200">
+        <a:defRPr sz="1600" kern="1200">
           <a:solidFill>
             <a:schemeClr val="tx1"/>
           </a:solidFill>
@@ -2966,7 +3016,7 @@
         </a:spcBef>
         <a:buFont typeface="Arial"/>
         <a:buChar char="•"/>
-        <a:defRPr sz="2000" kern="1200">
+        <a:defRPr sz="1600" kern="1200">
           <a:solidFill>
             <a:schemeClr val="tx1"/>
           </a:solidFill>
